--- a/assets/connpass-eyecatch/P029_eyecatch_temp.pptx
+++ b/assets/connpass-eyecatch/P029_eyecatch_temp.pptx
@@ -8918,29 +8918,7 @@
                 <a:ea typeface="Noto Sans JP" pitchFamily="34" charset="-122"/>
                 <a:cs typeface="Noto Sans JP" pitchFamily="34" charset="-120"/>
               </a:rPr>
-              <a:t>第29回：</a:t>
-            </a:r>
-            <a:r>
-              <a:rPr lang="en-US" sz="4500" b="1" dirty="0">
-                <a:solidFill>
-                  <a:srgbClr val="7C3AED"/>
-                </a:solidFill>
-                <a:latin typeface="Noto Sans JP" pitchFamily="34" charset="0"/>
-                <a:ea typeface="Noto Sans JP" pitchFamily="34" charset="-122"/>
-                <a:cs typeface="Noto Sans JP" pitchFamily="34" charset="-120"/>
-              </a:rPr>
-              <a:t>Copilot</a:t>
-            </a:r>
-            <a:r>
-              <a:rPr lang="en-US" sz="4500" b="1" dirty="0">
-                <a:solidFill>
-                  <a:srgbClr val="1F2937"/>
-                </a:solidFill>
-                <a:latin typeface="Noto Sans JP" pitchFamily="34" charset="0"/>
-                <a:ea typeface="Noto Sans JP" pitchFamily="34" charset="-122"/>
-                <a:cs typeface="Noto Sans JP" pitchFamily="34" charset="-120"/>
-              </a:rPr>
-              <a:t>と読み解いて</a:t>
+              <a:t>第29回：動的コンテンツに</a:t>
             </a:r>
           </a:p>
           <a:p>
@@ -8956,7 +8934,7 @@
                 <a:ea typeface="Noto Sans JP" pitchFamily="34" charset="-122"/>
                 <a:cs typeface="Noto Sans JP" pitchFamily="34" charset="-120"/>
               </a:rPr>
-              <a:t>動的コンテンツに無い値も</a:t>
+              <a:t>出てこない値も取り出せる</a:t>
             </a:r>
           </a:p>
           <a:p>
@@ -8966,13 +8944,24 @@
             <a:r>
               <a:rPr lang="en-US" sz="4500" b="1">
                 <a:solidFill>
+                  <a:srgbClr val="7C3AED"/>
+                </a:solidFill>
+                <a:latin typeface="Noto Sans JP" pitchFamily="34" charset="0"/>
+                <a:ea typeface="Noto Sans JP" pitchFamily="34" charset="-122"/>
+                <a:cs typeface="Noto Sans JP" pitchFamily="34" charset="-120"/>
+              </a:rPr>
+              <a:t>Copilot</a:t>
+            </a:r>
+            <a:r>
+              <a:rPr lang="en-US" sz="4500" b="1">
+                <a:solidFill>
                   <a:srgbClr val="1F2937"/>
                 </a:solidFill>
                 <a:latin typeface="Noto Sans JP" pitchFamily="34" charset="0"/>
                 <a:ea typeface="Noto Sans JP" pitchFamily="34" charset="-122"/>
                 <a:cs typeface="Noto Sans JP" pitchFamily="34" charset="-120"/>
               </a:rPr>
-              <a:t>式1行で取り出せる</a:t>
+              <a:t>と一緒に、式1行で</a:t>
             </a:r>
             <a:endParaRPr lang="en-US" sz="4500" dirty="0"/>
           </a:p>
